--- a/app/public/downloads/oshima-slides.pptx
+++ b/app/public/downloads/oshima-slides.pptx
@@ -3795,6 +3795,40 @@
           </a:p>
         </p:txBody>
       </p:sp>
+      <p:sp>
+        <p:nvSpPr>
+          <p:cNvPr id="12" name="TextBox 11"/>
+          <p:cNvSpPr txBox="1"/>
+          <p:nvPr/>
+        </p:nvSpPr>
+        <p:spPr>
+          <a:xfrm>
+            <a:off x="365750" y="6000750"/>
+            <a:ext cx="8778020" cy="411480"/>
+          </a:xfrm>
+          <a:prstGeom prst="rect">
+            <a:avLst/>
+          </a:prstGeom>
+          <a:noFill/>
+        </p:spPr>
+        <p:txBody>
+          <a:bodyPr wrap="square">
+            <a:spAutoFit/>
+          </a:bodyPr>
+          <a:lstStyle/>
+          <a:p>
+            <a:r>
+              <a:rPr sz="800">
+                <a:solidFill>
+                  <a:srgbClr val="B9CDD2"/>
+                </a:solidFill>
+                <a:latin typeface="Hiragino Kaku Gothic ProN"/>
+              </a:rPr>
+              <a:t>写真クレジット(Wikimedia Commons): Guilhem Vellut・Kentaro Ohno (CC BY 2.0)／lienyuan lee・alonfloc (CC BY 3.0)／Cassiopeia sweet・yano (CC BY-SA 3.0)／Yoshi Canopus・(WT-shared) Shoestring・Tsuyoshi chiba (CC BY-SA 4.0)／地図: © OpenStreetMap contributors</a:t>
+            </a:r>
+          </a:p>
+        </p:txBody>
+      </p:sp>
     </p:spTree>
   </p:cSld>
   <p:clrMapOvr>
@@ -6928,6 +6962,40 @@
           </a:p>
         </p:txBody>
       </p:sp>
+      <p:sp>
+        <p:nvSpPr>
+          <p:cNvPr id="14" name="TextBox 13"/>
+          <p:cNvSpPr txBox="1"/>
+          <p:nvPr/>
+        </p:nvSpPr>
+        <p:spPr>
+          <a:xfrm>
+            <a:off x="365750" y="6000750"/>
+            <a:ext cx="11460193" cy="411480"/>
+          </a:xfrm>
+          <a:prstGeom prst="rect">
+            <a:avLst/>
+          </a:prstGeom>
+          <a:noFill/>
+        </p:spPr>
+        <p:txBody>
+          <a:bodyPr wrap="square">
+            <a:spAutoFit/>
+          </a:bodyPr>
+          <a:lstStyle/>
+          <a:p>
+            <a:r>
+              <a:rPr sz="800">
+                <a:solidFill>
+                  <a:srgbClr val="8A8A8A"/>
+                </a:solidFill>
+                <a:latin typeface="Hiragino Kaku Gothic ProN"/>
+              </a:rPr>
+              <a:t>画面内写真: Guilhem Vellut / CC BY 2.0 (Wikimedia Commons)</a:t>
+            </a:r>
+          </a:p>
+        </p:txBody>
+      </p:sp>
     </p:spTree>
   </p:cSld>
   <p:clrMapOvr>
@@ -7247,6 +7315,40 @@
                 <a:latin typeface="Hiragino Sans"/>
               </a:rPr>
               <a:t>7</a:t>
+            </a:r>
+          </a:p>
+        </p:txBody>
+      </p:sp>
+      <p:sp>
+        <p:nvSpPr>
+          <p:cNvPr id="10" name="TextBox 9"/>
+          <p:cNvSpPr txBox="1"/>
+          <p:nvPr/>
+        </p:nvSpPr>
+        <p:spPr>
+          <a:xfrm>
+            <a:off x="365750" y="6000750"/>
+            <a:ext cx="11460193" cy="411480"/>
+          </a:xfrm>
+          <a:prstGeom prst="rect">
+            <a:avLst/>
+          </a:prstGeom>
+          <a:noFill/>
+        </p:spPr>
+        <p:txBody>
+          <a:bodyPr wrap="square">
+            <a:spAutoFit/>
+          </a:bodyPr>
+          <a:lstStyle/>
+          <a:p>
+            <a:r>
+              <a:rPr sz="800">
+                <a:solidFill>
+                  <a:srgbClr val="8A8A8A"/>
+                </a:solidFill>
+                <a:latin typeface="Hiragino Kaku Gothic ProN"/>
+              </a:rPr>
+              <a:t>画面内写真: Kentaro Ohno / CC BY 2.0・yano / CC BY-SA 3.0・Yoshi Canopus・(WT-shared) Shoestring・Tsuyoshi chiba / CC BY-SA 4.0 (Wikimedia Commons)／地図: © OpenStreetMap contributors</a:t>
             </a:r>
           </a:p>
         </p:txBody>

--- a/app/public/downloads/oshima-slides.pptx
+++ b/app/public/downloads/oshima-slides.pptx
@@ -3319,7 +3319,7 @@
                 </a:solidFill>
                 <a:latin typeface="Hiragino Sans"/>
               </a:rPr>
-              <a:t>SBC.別班連携チーム</a:t>
+              <a:t>SBC.情報通信技術部特別班</a:t>
             </a:r>
           </a:p>
         </p:txBody>
@@ -3731,7 +3731,7 @@
                 </a:solidFill>
                 <a:latin typeface="Hiragino Sans"/>
               </a:rPr>
-              <a:t>🏝️ 大島スマートコース ｜ SBC.別班連携チーム</a:t>
+              <a:t>🏝️ 大島スマートコース ｜ SBC.情報通信技術部特別班</a:t>
             </a:r>
           </a:p>
         </p:txBody>
@@ -4209,7 +4209,7 @@
                 </a:solidFill>
                 <a:latin typeface="Hiragino Sans"/>
               </a:rPr>
-              <a:t>大島スマートコース ｜ SBC.別班連携チーム ｜ 東京都知事杯オープンデータ・ハッカソン2026</a:t>
+              <a:t>大島スマートコース ｜ SBC.情報通信技術部特別班 ｜ 東京都知事杯オープンデータ・ハッカソン2026</a:t>
             </a:r>
           </a:p>
         </p:txBody>
@@ -4357,7 +4357,7 @@
                 </a:solidFill>
                 <a:latin typeface="Hiragino Sans"/>
               </a:rPr>
-              <a:t>知らないと初日が崩れる、4つの数字</a:t>
+              <a:t>知らないと初日が崩れる、島の現実</a:t>
             </a:r>
           </a:p>
         </p:txBody>
@@ -4444,7 +4444,7 @@
                 </a:solidFill>
                 <a:latin typeface="Hiragino Sans"/>
               </a:rPr>
-              <a:t>500円</a:t>
+              <a:t>乗車拒否</a:t>
             </a:r>
           </a:p>
         </p:txBody>
@@ -4483,7 +4483,7 @@
                 </a:solidFill>
                 <a:latin typeface="Hiragino Sans"/>
               </a:rPr>
-              <a:t>大きな荷物はバスで1個500円</a:t>
+              <a:t>大きな荷物は混雑時に</a:t>
             </a:r>
           </a:p>
           <a:p>
@@ -4499,7 +4499,7 @@
                 </a:solidFill>
                 <a:latin typeface="Hiragino Sans"/>
               </a:rPr>
-              <a:t>混雑時は乗車拒否も</a:t>
+              <a:t>乗車を断られることも</a:t>
             </a:r>
           </a:p>
         </p:txBody>
@@ -4960,7 +4960,7 @@
                 </a:solidFill>
                 <a:latin typeface="Hiragino Sans"/>
               </a:rPr>
-              <a:t>大島スマートコース ｜ SBC.別班連携チーム ｜ 東京都知事杯オープンデータ・ハッカソン2026</a:t>
+              <a:t>大島スマートコース ｜ SBC.情報通信技術部特別班 ｜ 東京都知事杯オープンデータ・ハッカソン2026</a:t>
             </a:r>
           </a:p>
         </p:txBody>
@@ -5787,7 +5787,7 @@
                 </a:solidFill>
                 <a:latin typeface="Hiragino Sans"/>
               </a:rPr>
-              <a:t>大島スマートコース ｜ SBC.別班連携チーム ｜ 東京都知事杯オープンデータ・ハッカソン2026</a:t>
+              <a:t>大島スマートコース ｜ SBC.情報通信技術部特別班 ｜ 東京都知事杯オープンデータ・ハッカソン2026</a:t>
             </a:r>
           </a:p>
         </p:txBody>
@@ -6470,7 +6470,7 @@
                 </a:solidFill>
                 <a:latin typeface="Hiragino Sans"/>
               </a:rPr>
-              <a:t>大島スマートコース ｜ SBC.別班連携チーム ｜ 東京都知事杯オープンデータ・ハッカソン2026</a:t>
+              <a:t>大島スマートコース ｜ SBC.情報通信技術部特別班 ｜ 東京都知事杯オープンデータ・ハッカソン2026</a:t>
             </a:r>
           </a:p>
         </p:txBody>
@@ -6922,7 +6922,7 @@
                 </a:solidFill>
                 <a:latin typeface="Hiragino Sans"/>
               </a:rPr>
-              <a:t>大島スマートコース ｜ SBC.別班連携チーム ｜ 東京都知事杯オープンデータ・ハッカソン2026</a:t>
+              <a:t>大島スマートコース ｜ SBC.情報通信技術部特別班 ｜ 東京都知事杯オープンデータ・ハッカソン2026</a:t>
             </a:r>
           </a:p>
         </p:txBody>
@@ -7279,7 +7279,7 @@
                 </a:solidFill>
                 <a:latin typeface="Hiragino Sans"/>
               </a:rPr>
-              <a:t>大島スマートコース ｜ SBC.別班連携チーム ｜ 東京都知事杯オープンデータ・ハッカソン2026</a:t>
+              <a:t>大島スマートコース ｜ SBC.情報通信技術部特別班 ｜ 東京都知事杯オープンデータ・ハッカソン2026</a:t>
             </a:r>
           </a:p>
         </p:txBody>
@@ -7706,7 +7706,7 @@
                 </a:solidFill>
                 <a:latin typeface="Hiragino Sans"/>
               </a:rPr>
-              <a:t>大島スマートコース ｜ SBC.別班連携チーム ｜ 東京都知事杯オープンデータ・ハッカソン2026</a:t>
+              <a:t>大島スマートコース ｜ SBC.情報通信技術部特別班 ｜ 東京都知事杯オープンデータ・ハッカソン2026</a:t>
             </a:r>
           </a:p>
         </p:txBody>
@@ -8006,7 +8006,7 @@
                 </a:solidFill>
                 <a:latin typeface="Hiragino Sans"/>
               </a:rPr>
-              <a:t>大島スマートコース ｜ SBC.別班連携チーム ｜ 東京都知事杯オープンデータ・ハッカソン2026</a:t>
+              <a:t>大島スマートコース ｜ SBC.情報通信技術部特別班 ｜ 東京都知事杯オープンデータ・ハッカソン2026</a:t>
             </a:r>
           </a:p>
         </p:txBody>
